--- a/part1/Introduction-to-FMI.pptx
+++ b/part1/Introduction-to-FMI.pptx
@@ -451,7 +451,7 @@
               <a:pPr>
                 <a:defRPr/>
               </a:pPr>
-              <a:t>‹Nr.›</a:t>
+              <a:t>‹#›</a:t>
             </a:fld>
             <a:endParaRPr lang="de-DE" altLang="en-US"/>
           </a:p>
@@ -472,12 +472,9 @@
 <p:notesMaster xmlns:a="http://schemas.openxmlformats.org/drawingml/2006/main" xmlns:r="http://schemas.openxmlformats.org/officeDocument/2006/relationships" xmlns:p="http://schemas.openxmlformats.org/presentationml/2006/main">
   <p:cSld>
     <p:bg>
-      <p:bgPr>
-        <a:solidFill>
-          <a:schemeClr val="bg1"/>
-        </a:solidFill>
-        <a:effectLst/>
-      </p:bgPr>
+      <p:bgRef idx="1001">
+        <a:schemeClr val="bg1"/>
+      </p:bgRef>
     </p:bg>
     <p:spTree>
       <p:nvGrpSpPr>
@@ -493,326 +490,16 @@
           <a:chExt cx="0" cy="0"/>
         </a:xfrm>
       </p:grpSpPr>
-      <p:sp>
-        <p:nvSpPr>
-          <p:cNvPr id="2" name="Kopfzeilenplatzhalter 1">
-            <a:extLst>
-              <a:ext uri="{FF2B5EF4-FFF2-40B4-BE49-F238E27FC236}">
-                <a16:creationId xmlns:a16="http://schemas.microsoft.com/office/drawing/2014/main" id="{97DDC6B2-BAE9-4F15-BA17-0988F2AC4C6B}"/>
-              </a:ext>
-            </a:extLst>
-          </p:cNvPr>
-          <p:cNvSpPr>
-            <a:spLocks noGrp="1"/>
-          </p:cNvSpPr>
-          <p:nvPr>
-            <p:ph type="hdr" sz="quarter"/>
-          </p:nvPr>
-        </p:nvSpPr>
-        <p:spPr>
-          <a:xfrm>
-            <a:off x="0" y="0"/>
-            <a:ext cx="2971800" cy="457200"/>
-          </a:xfrm>
-          <a:prstGeom prst="rect">
-            <a:avLst/>
-          </a:prstGeom>
-        </p:spPr>
-        <p:txBody>
-          <a:bodyPr vert="horz" wrap="square" lIns="91440" tIns="45720" rIns="91440" bIns="45720" numCol="1" anchor="t" anchorCtr="0" compatLnSpc="1">
-            <a:prstTxWarp prst="textNoShape">
-              <a:avLst/>
-            </a:prstTxWarp>
-          </a:bodyPr>
-          <a:lstStyle>
-            <a:lvl1pPr eaLnBrk="1" hangingPunct="1">
-              <a:defRPr sz="1200">
-                <a:latin typeface="Arial" charset="0"/>
-                <a:cs typeface="Arial" charset="0"/>
-              </a:defRPr>
-            </a:lvl1pPr>
-          </a:lstStyle>
-          <a:p>
-            <a:pPr>
-              <a:defRPr/>
-            </a:pPr>
-            <a:endParaRPr lang="en-US"/>
-          </a:p>
-        </p:txBody>
-      </p:sp>
-      <p:sp>
-        <p:nvSpPr>
-          <p:cNvPr id="3" name="Datumsplatzhalter 2">
-            <a:extLst>
-              <a:ext uri="{FF2B5EF4-FFF2-40B4-BE49-F238E27FC236}">
-                <a16:creationId xmlns:a16="http://schemas.microsoft.com/office/drawing/2014/main" id="{E72D93E0-79D8-4A1A-94C8-E2FAFFFE15E7}"/>
-              </a:ext>
-            </a:extLst>
-          </p:cNvPr>
-          <p:cNvSpPr>
-            <a:spLocks noGrp="1"/>
-          </p:cNvSpPr>
-          <p:nvPr>
-            <p:ph type="dt" idx="1"/>
-          </p:nvPr>
-        </p:nvSpPr>
-        <p:spPr>
-          <a:xfrm>
-            <a:off x="3884613" y="0"/>
-            <a:ext cx="2971800" cy="457200"/>
-          </a:xfrm>
-          <a:prstGeom prst="rect">
-            <a:avLst/>
-          </a:prstGeom>
-        </p:spPr>
-        <p:txBody>
-          <a:bodyPr vert="horz" wrap="square" lIns="91440" tIns="45720" rIns="91440" bIns="45720" numCol="1" anchor="t" anchorCtr="0" compatLnSpc="1">
-            <a:prstTxWarp prst="textNoShape">
-              <a:avLst/>
-            </a:prstTxWarp>
-          </a:bodyPr>
-          <a:lstStyle>
-            <a:lvl1pPr algn="r" eaLnBrk="1" hangingPunct="1">
-              <a:defRPr sz="1200">
-                <a:latin typeface="Arial" charset="0"/>
-                <a:cs typeface="Arial" charset="0"/>
-              </a:defRPr>
-            </a:lvl1pPr>
-          </a:lstStyle>
-          <a:p>
-            <a:pPr>
-              <a:defRPr/>
-            </a:pPr>
-            <a:fld id="{C4BA1F97-1BE7-4EFA-9D91-E765E6F6BC0D}" type="datetimeFigureOut">
-              <a:rPr lang="en-US"/>
-              <a:pPr>
-                <a:defRPr/>
-              </a:pPr>
-              <a:t>9/19/2025</a:t>
-            </a:fld>
-            <a:endParaRPr lang="en-US"/>
-          </a:p>
-        </p:txBody>
-      </p:sp>
-      <p:sp>
-        <p:nvSpPr>
-          <p:cNvPr id="4" name="Folienbildplatzhalter 3">
-            <a:extLst>
-              <a:ext uri="{FF2B5EF4-FFF2-40B4-BE49-F238E27FC236}">
-                <a16:creationId xmlns:a16="http://schemas.microsoft.com/office/drawing/2014/main" id="{C0472C7B-0169-4D84-989F-CCC06BAE6D00}"/>
-              </a:ext>
-            </a:extLst>
-          </p:cNvPr>
-          <p:cNvSpPr>
-            <a:spLocks noGrp="1" noRot="1" noChangeAspect="1"/>
-          </p:cNvSpPr>
-          <p:nvPr>
-            <p:ph type="sldImg" idx="2"/>
-          </p:nvPr>
-        </p:nvSpPr>
-        <p:spPr>
-          <a:xfrm>
-            <a:off x="381000" y="685800"/>
-            <a:ext cx="6096000" cy="3429000"/>
-          </a:xfrm>
-          <a:prstGeom prst="rect">
-            <a:avLst/>
-          </a:prstGeom>
-          <a:noFill/>
-          <a:ln w="12700">
-            <a:solidFill>
-              <a:prstClr val="black"/>
-            </a:solidFill>
-          </a:ln>
-        </p:spPr>
-        <p:txBody>
-          <a:bodyPr vert="horz" lIns="91440" tIns="45720" rIns="91440" bIns="45720" rtlCol="0" anchor="ctr"/>
-          <a:lstStyle/>
-          <a:p>
-            <a:pPr lvl="0"/>
-            <a:endParaRPr lang="en-US" noProof="0"/>
-          </a:p>
-        </p:txBody>
-      </p:sp>
-      <p:sp>
-        <p:nvSpPr>
-          <p:cNvPr id="5" name="Notizenplatzhalter 4">
-            <a:extLst>
-              <a:ext uri="{FF2B5EF4-FFF2-40B4-BE49-F238E27FC236}">
-                <a16:creationId xmlns:a16="http://schemas.microsoft.com/office/drawing/2014/main" id="{B7BFA9F0-B57E-48A0-8F1A-E7AD8BE8E975}"/>
-              </a:ext>
-            </a:extLst>
-          </p:cNvPr>
-          <p:cNvSpPr>
-            <a:spLocks noGrp="1"/>
-          </p:cNvSpPr>
-          <p:nvPr>
-            <p:ph type="body" sz="quarter" idx="3"/>
-          </p:nvPr>
-        </p:nvSpPr>
-        <p:spPr>
-          <a:xfrm>
-            <a:off x="685800" y="4343400"/>
-            <a:ext cx="5486400" cy="4114800"/>
-          </a:xfrm>
-          <a:prstGeom prst="rect">
-            <a:avLst/>
-          </a:prstGeom>
-        </p:spPr>
-        <p:txBody>
-          <a:bodyPr vert="horz" wrap="square" lIns="91440" tIns="45720" rIns="91440" bIns="45720" numCol="1" anchor="t" anchorCtr="0" compatLnSpc="1">
-            <a:prstTxWarp prst="textNoShape">
-              <a:avLst/>
-            </a:prstTxWarp>
-          </a:bodyPr>
-          <a:lstStyle/>
-          <a:p>
-            <a:pPr lvl="0"/>
-            <a:r>
-              <a:rPr lang="de-DE" noProof="0"/>
-              <a:t>Textmasterformat bearbeiten</a:t>
-            </a:r>
-          </a:p>
-          <a:p>
-            <a:pPr lvl="1"/>
-            <a:r>
-              <a:rPr lang="de-DE" noProof="0"/>
-              <a:t>Zweite Ebene</a:t>
-            </a:r>
-          </a:p>
-          <a:p>
-            <a:pPr lvl="2"/>
-            <a:r>
-              <a:rPr lang="de-DE" noProof="0"/>
-              <a:t>Dritte Ebene</a:t>
-            </a:r>
-          </a:p>
-          <a:p>
-            <a:pPr lvl="3"/>
-            <a:r>
-              <a:rPr lang="de-DE" noProof="0"/>
-              <a:t>Vierte Ebene</a:t>
-            </a:r>
-          </a:p>
-          <a:p>
-            <a:pPr lvl="4"/>
-            <a:r>
-              <a:rPr lang="de-DE" noProof="0"/>
-              <a:t>Fünfte Ebene</a:t>
-            </a:r>
-            <a:endParaRPr lang="en-US" noProof="0"/>
-          </a:p>
-        </p:txBody>
-      </p:sp>
-      <p:sp>
-        <p:nvSpPr>
-          <p:cNvPr id="6" name="Fußzeilenplatzhalter 5">
-            <a:extLst>
-              <a:ext uri="{FF2B5EF4-FFF2-40B4-BE49-F238E27FC236}">
-                <a16:creationId xmlns:a16="http://schemas.microsoft.com/office/drawing/2014/main" id="{06AC7A05-627B-407F-AB8B-2DEA46ACF379}"/>
-              </a:ext>
-            </a:extLst>
-          </p:cNvPr>
-          <p:cNvSpPr>
-            <a:spLocks noGrp="1"/>
-          </p:cNvSpPr>
-          <p:nvPr>
-            <p:ph type="ftr" sz="quarter" idx="4"/>
-          </p:nvPr>
-        </p:nvSpPr>
-        <p:spPr>
-          <a:xfrm>
-            <a:off x="0" y="8685213"/>
-            <a:ext cx="2971800" cy="457200"/>
-          </a:xfrm>
-          <a:prstGeom prst="rect">
-            <a:avLst/>
-          </a:prstGeom>
-        </p:spPr>
-        <p:txBody>
-          <a:bodyPr vert="horz" wrap="square" lIns="91440" tIns="45720" rIns="91440" bIns="45720" numCol="1" anchor="b" anchorCtr="0" compatLnSpc="1">
-            <a:prstTxWarp prst="textNoShape">
-              <a:avLst/>
-            </a:prstTxWarp>
-          </a:bodyPr>
-          <a:lstStyle>
-            <a:lvl1pPr eaLnBrk="1" hangingPunct="1">
-              <a:defRPr sz="1200">
-                <a:latin typeface="Arial" charset="0"/>
-                <a:cs typeface="Arial" charset="0"/>
-              </a:defRPr>
-            </a:lvl1pPr>
-          </a:lstStyle>
-          <a:p>
-            <a:pPr>
-              <a:defRPr/>
-            </a:pPr>
-            <a:endParaRPr lang="en-US"/>
-          </a:p>
-        </p:txBody>
-      </p:sp>
-      <p:sp>
-        <p:nvSpPr>
-          <p:cNvPr id="7" name="Foliennummernplatzhalter 6">
-            <a:extLst>
-              <a:ext uri="{FF2B5EF4-FFF2-40B4-BE49-F238E27FC236}">
-                <a16:creationId xmlns:a16="http://schemas.microsoft.com/office/drawing/2014/main" id="{F4335BE4-0B65-4095-A55D-040C4721ECB7}"/>
-              </a:ext>
-            </a:extLst>
-          </p:cNvPr>
-          <p:cNvSpPr>
-            <a:spLocks noGrp="1"/>
-          </p:cNvSpPr>
-          <p:nvPr>
-            <p:ph type="sldNum" sz="quarter" idx="5"/>
-          </p:nvPr>
-        </p:nvSpPr>
-        <p:spPr>
-          <a:xfrm>
-            <a:off x="3884613" y="8685213"/>
-            <a:ext cx="2971800" cy="457200"/>
-          </a:xfrm>
-          <a:prstGeom prst="rect">
-            <a:avLst/>
-          </a:prstGeom>
-        </p:spPr>
-        <p:txBody>
-          <a:bodyPr vert="horz" wrap="square" lIns="91440" tIns="45720" rIns="91440" bIns="45720" numCol="1" anchor="b" anchorCtr="0" compatLnSpc="1">
-            <a:prstTxWarp prst="textNoShape">
-              <a:avLst/>
-            </a:prstTxWarp>
-          </a:bodyPr>
-          <a:lstStyle>
-            <a:lvl1pPr algn="r" eaLnBrk="1" hangingPunct="1">
-              <a:defRPr sz="1200" smtClean="0"/>
-            </a:lvl1pPr>
-          </a:lstStyle>
-          <a:p>
-            <a:pPr>
-              <a:defRPr/>
-            </a:pPr>
-            <a:fld id="{3AB06A50-7B57-4553-B2BC-E857236DEF86}" type="slidenum">
-              <a:rPr lang="en-US" altLang="en-US"/>
-              <a:pPr>
-                <a:defRPr/>
-              </a:pPr>
-              <a:t>‹Nr.›</a:t>
-            </a:fld>
-            <a:endParaRPr lang="en-US" altLang="en-US"/>
-          </a:p>
-        </p:txBody>
-      </p:sp>
     </p:spTree>
+    <p:extLst>
+      <p:ext uri="{BB962C8B-B14F-4D97-AF65-F5344CB8AC3E}">
+        <p14:creationId xmlns:p14="http://schemas.microsoft.com/office/powerpoint/2010/main" val="1477849782"/>
+      </p:ext>
+    </p:extLst>
   </p:cSld>
   <p:clrMap bg1="lt1" tx1="dk1" bg2="lt2" tx2="dk2" accent1="accent1" accent2="accent2" accent3="accent3" accent4="accent4" accent5="accent5" accent6="accent6" hlink="hlink" folHlink="folHlink"/>
   <p:notesStyle>
-    <a:lvl1pPr algn="l" rtl="0" eaLnBrk="0" fontAlgn="base" hangingPunct="0">
-      <a:spcBef>
-        <a:spcPct val="30000"/>
-      </a:spcBef>
-      <a:spcAft>
-        <a:spcPct val="0"/>
-      </a:spcAft>
+    <a:lvl1pPr marL="0" algn="l" defTabSz="914400" rtl="0" eaLnBrk="1" latinLnBrk="0" hangingPunct="1">
       <a:defRPr sz="1200" kern="1200">
         <a:solidFill>
           <a:schemeClr val="tx1"/>
@@ -822,13 +509,7 @@
         <a:cs typeface="+mn-cs"/>
       </a:defRPr>
     </a:lvl1pPr>
-    <a:lvl2pPr marL="457200" algn="l" rtl="0" eaLnBrk="0" fontAlgn="base" hangingPunct="0">
-      <a:spcBef>
-        <a:spcPct val="30000"/>
-      </a:spcBef>
-      <a:spcAft>
-        <a:spcPct val="0"/>
-      </a:spcAft>
+    <a:lvl2pPr marL="457200" algn="l" defTabSz="914400" rtl="0" eaLnBrk="1" latinLnBrk="0" hangingPunct="1">
       <a:defRPr sz="1200" kern="1200">
         <a:solidFill>
           <a:schemeClr val="tx1"/>
@@ -838,13 +519,7 @@
         <a:cs typeface="+mn-cs"/>
       </a:defRPr>
     </a:lvl2pPr>
-    <a:lvl3pPr marL="914400" algn="l" rtl="0" eaLnBrk="0" fontAlgn="base" hangingPunct="0">
-      <a:spcBef>
-        <a:spcPct val="30000"/>
-      </a:spcBef>
-      <a:spcAft>
-        <a:spcPct val="0"/>
-      </a:spcAft>
+    <a:lvl3pPr marL="914400" algn="l" defTabSz="914400" rtl="0" eaLnBrk="1" latinLnBrk="0" hangingPunct="1">
       <a:defRPr sz="1200" kern="1200">
         <a:solidFill>
           <a:schemeClr val="tx1"/>
@@ -854,13 +529,7 @@
         <a:cs typeface="+mn-cs"/>
       </a:defRPr>
     </a:lvl3pPr>
-    <a:lvl4pPr marL="1371600" algn="l" rtl="0" eaLnBrk="0" fontAlgn="base" hangingPunct="0">
-      <a:spcBef>
-        <a:spcPct val="30000"/>
-      </a:spcBef>
-      <a:spcAft>
-        <a:spcPct val="0"/>
-      </a:spcAft>
+    <a:lvl4pPr marL="1371600" algn="l" defTabSz="914400" rtl="0" eaLnBrk="1" latinLnBrk="0" hangingPunct="1">
       <a:defRPr sz="1200" kern="1200">
         <a:solidFill>
           <a:schemeClr val="tx1"/>
@@ -870,13 +539,7 @@
         <a:cs typeface="+mn-cs"/>
       </a:defRPr>
     </a:lvl4pPr>
-    <a:lvl5pPr marL="1828800" algn="l" rtl="0" eaLnBrk="0" fontAlgn="base" hangingPunct="0">
-      <a:spcBef>
-        <a:spcPct val="30000"/>
-      </a:spcBef>
-      <a:spcAft>
-        <a:spcPct val="0"/>
-      </a:spcAft>
+    <a:lvl5pPr marL="1828800" algn="l" defTabSz="914400" rtl="0" eaLnBrk="1" latinLnBrk="0" hangingPunct="1">
       <a:defRPr sz="1200" kern="1200">
         <a:solidFill>
           <a:schemeClr val="tx1"/>
@@ -1393,7 +1056,7 @@
                   <a:srgbClr val="5E676E"/>
                 </a:solidFill>
               </a:rPr>
-              <a:t>© 2025 FMI Modelica Association Project | www.fmi-standard.org</a:t>
+              <a:t>© 2026 FMI Modelica Association Project | www.fmi-standard.org</a:t>
             </a:r>
           </a:p>
         </p:txBody>
@@ -2455,7 +2118,7 @@
             <a:fld id="{4898AEC0-503E-4FA4-859C-D0F72D6E3F79}" type="slidenum">
               <a:rPr lang="en-US" noProof="1" smtClean="0"/>
               <a:pPr/>
-              <a:t>‹Nr.›</a:t>
+              <a:t>‹#›</a:t>
             </a:fld>
             <a:endParaRPr lang="en-US" noProof="1"/>
           </a:p>
@@ -2867,7 +2530,7 @@
                   <a:srgbClr val="C00000"/>
                 </a:solidFill>
               </a:rPr>
-              <a:t>© 2025 Modelica Association Project FMI | www.fmi-standard.org</a:t>
+              <a:t>© 2026 Modelica Association Project FMI | www.fmi-standard.org</a:t>
             </a:r>
           </a:p>
         </p:txBody>
@@ -3048,7 +2711,7 @@
                 </a:spcBef>
                 <a:defRPr/>
               </a:pPr>
-              <a:t>‹Nr.›</a:t>
+              <a:t>‹#›</a:t>
             </a:fld>
             <a:endParaRPr lang="de-DE" altLang="en-US" sz="1000" dirty="0">
               <a:solidFill>
@@ -3749,8 +3412,8 @@
         </p:nvSpPr>
         <p:spPr>
           <a:xfrm>
-            <a:off x="4365171" y="3956033"/>
-            <a:ext cx="3951515" cy="1569660"/>
+            <a:off x="4060354" y="4554403"/>
+            <a:ext cx="3951515" cy="1323439"/>
           </a:xfrm>
           <a:prstGeom prst="rect">
             <a:avLst/>
@@ -3765,6 +3428,16 @@
           <a:p>
             <a:pPr algn="ctr"/>
             <a:r>
+              <a:rPr lang="en-US" dirty="0">
+                <a:solidFill>
+                  <a:srgbClr val="5E676E"/>
+                </a:solidFill>
+                <a:latin typeface="+mn-lt"/>
+                <a:cs typeface="+mn-cs"/>
+              </a:rPr>
+              <a:t>Further </a:t>
+            </a:r>
+            <a:r>
               <a:rPr lang="en-US" sz="1600" dirty="0">
                 <a:solidFill>
                   <a:srgbClr val="5E676E"/>
@@ -3791,39 +3464,6 @@
           <a:p>
             <a:pPr algn="ctr"/>
             <a:r>
-              <a:rPr lang="en-US" u="sng" dirty="0">
-                <a:solidFill>
-                  <a:srgbClr val="5E676E"/>
-                </a:solidFill>
-                <a:latin typeface="+mn-lt"/>
-                <a:cs typeface="+mn-cs"/>
-              </a:rPr>
-              <a:t>Christian Bertsch</a:t>
-            </a:r>
-            <a:r>
-              <a:rPr lang="en-US" dirty="0">
-                <a:solidFill>
-                  <a:srgbClr val="5E676E"/>
-                </a:solidFill>
-                <a:latin typeface="+mn-lt"/>
-                <a:cs typeface="+mn-cs"/>
-              </a:rPr>
-              <a:t>, Bosch Research</a:t>
-            </a:r>
-          </a:p>
-          <a:p>
-            <a:pPr algn="ctr"/>
-            <a:r>
-              <a:rPr lang="en-US" sz="1600" u="sng" dirty="0">
-                <a:solidFill>
-                  <a:srgbClr val="5E676E"/>
-                </a:solidFill>
-                <a:latin typeface="+mn-lt"/>
-                <a:cs typeface="+mn-cs"/>
-              </a:rPr>
-              <a:t>Claudio Gomes</a:t>
-            </a:r>
-            <a:r>
               <a:rPr lang="en-US" sz="1600" dirty="0">
                 <a:solidFill>
                   <a:srgbClr val="5E676E"/>
@@ -3831,21 +3471,11 @@
                 <a:latin typeface="+mn-lt"/>
                 <a:cs typeface="+mn-cs"/>
               </a:rPr>
-              <a:t>, Aarhus University</a:t>
+              <a:t>Claudio Gomes, Aarhus University</a:t>
             </a:r>
           </a:p>
           <a:p>
             <a:pPr algn="ctr"/>
-            <a:r>
-              <a:rPr lang="en-US" sz="1600" u="sng" dirty="0">
-                <a:solidFill>
-                  <a:srgbClr val="5E676E"/>
-                </a:solidFill>
-                <a:latin typeface="+mn-lt"/>
-                <a:cs typeface="+mn-cs"/>
-              </a:rPr>
-              <a:t>Maurizio Palmieri</a:t>
-            </a:r>
             <a:r>
               <a:rPr lang="en-US" sz="1600" dirty="0">
                 <a:solidFill>
@@ -3854,7 +3484,7 @@
                 <a:latin typeface="+mn-lt"/>
                 <a:cs typeface="+mn-cs"/>
               </a:rPr>
-              <a:t>, University of Pisa</a:t>
+              <a:t>Maurizio Palmieri, University of Pisa</a:t>
             </a:r>
           </a:p>
           <a:p>
@@ -3903,7 +3533,7 @@
         </p:nvSpPr>
         <p:spPr>
           <a:xfrm>
-            <a:off x="9619757" y="3586701"/>
+            <a:off x="9641566" y="3785577"/>
             <a:ext cx="2142256" cy="369332"/>
           </a:xfrm>
           <a:prstGeom prst="rect">
@@ -3988,7 +3618,7 @@
                 <a:cs typeface="+mn-cs"/>
                 <a:hlinkClick r:id="rId4"/>
               </a:rPr>
-              <a:t>fmi-beginners-tutorial-2025/tree/main</a:t>
+              <a:t>fmi-beginners-tutorial-2026/tree/main</a:t>
             </a:r>
             <a:endParaRPr lang="en-US" sz="1200" dirty="0">
               <a:solidFill>
@@ -4045,12 +3675,54 @@
           </a:prstGeom>
         </p:spPr>
       </p:pic>
+      <p:sp>
+        <p:nvSpPr>
+          <p:cNvPr id="6" name="TextBox 5">
+            <a:extLst>
+              <a:ext uri="{FF2B5EF4-FFF2-40B4-BE49-F238E27FC236}">
+                <a16:creationId xmlns:a16="http://schemas.microsoft.com/office/drawing/2014/main" id="{30090441-971C-1EA1-4454-E661ECB40154}"/>
+              </a:ext>
+            </a:extLst>
+          </p:cNvPr>
+          <p:cNvSpPr txBox="1"/>
+          <p:nvPr/>
+        </p:nvSpPr>
+        <p:spPr>
+          <a:xfrm>
+            <a:off x="2653702" y="3828465"/>
+            <a:ext cx="7178510" cy="369332"/>
+          </a:xfrm>
+          <a:prstGeom prst="rect">
+            <a:avLst/>
+          </a:prstGeom>
+          <a:noFill/>
+        </p:spPr>
+        <p:txBody>
+          <a:bodyPr wrap="square">
+            <a:spAutoFit/>
+          </a:bodyPr>
+          <a:lstStyle/>
+          <a:p>
+            <a:pPr algn="ctr"/>
+            <a:r>
+              <a:rPr lang="en-US" sz="1800" b="1" dirty="0">
+                <a:solidFill>
+                  <a:srgbClr val="5E676E"/>
+                </a:solidFill>
+                <a:latin typeface="+mn-lt"/>
+                <a:cs typeface="+mn-cs"/>
+              </a:rPr>
+              <a:t>Christian Bertsch, Bosch Research, FMI Project Leader </a:t>
+            </a:r>
+          </a:p>
+        </p:txBody>
+      </p:sp>
       <p:pic>
         <p:nvPicPr>
-          <p:cNvPr id="10" name="Grafik 9">
+          <p:cNvPr id="11" name="Graphic 10">
             <a:extLst>
               <a:ext uri="{FF2B5EF4-FFF2-40B4-BE49-F238E27FC236}">
-                <a16:creationId xmlns:a16="http://schemas.microsoft.com/office/drawing/2014/main" id="{80177D94-F5B4-0EF9-4E60-66E4A4E91314}"/>
+                <a16:creationId xmlns:a16="http://schemas.microsoft.com/office/drawing/2014/main" id="{B754C390-A8A6-D882-C24A-172EF3EFBFAE}"/>
               </a:ext>
             </a:extLst>
           </p:cNvPr>
@@ -4060,10 +3732,10 @@
           <p:nvPr/>
         </p:nvPicPr>
         <p:blipFill>
-          <a:blip r:embed="rId6">
+          <a:blip>
             <a:extLst>
-              <a:ext uri="{28A0092B-C50C-407E-A947-70E740481C1C}">
-                <a14:useLocalDpi xmlns:a14="http://schemas.microsoft.com/office/drawing/2010/main" val="0"/>
+              <a:ext uri="{96DAC541-7B7A-43D3-8B79-37D633B846F1}">
+                <asvg:svgBlip xmlns:asvg="http://schemas.microsoft.com/office/drawing/2016/SVG/main" r:embed="rId6"/>
               </a:ext>
             </a:extLst>
           </a:blip>
@@ -4073,8 +3745,8 @@
         </p:blipFill>
         <p:spPr>
           <a:xfrm>
-            <a:off x="9619757" y="3935135"/>
-            <a:ext cx="1942707" cy="1942707"/>
+            <a:off x="9641566" y="4078152"/>
+            <a:ext cx="1821427" cy="1821427"/>
           </a:xfrm>
           <a:prstGeom prst="rect">
             <a:avLst/>
@@ -4766,23 +4438,7 @@
                   <a:srgbClr val="C00000"/>
                 </a:solidFill>
               </a:rPr>
-              <a:t>© 2025 Modelica </a:t>
-            </a:r>
-            <a:r>
-              <a:rPr lang="de-DE" sz="1000" dirty="0" err="1">
-                <a:solidFill>
-                  <a:srgbClr val="C00000"/>
-                </a:solidFill>
-              </a:rPr>
-              <a:t>Association</a:t>
-            </a:r>
-            <a:r>
-              <a:rPr lang="de-DE" sz="1000" dirty="0">
-                <a:solidFill>
-                  <a:srgbClr val="C00000"/>
-                </a:solidFill>
-              </a:rPr>
-              <a:t> Project FMI | fmi-standard.org</a:t>
+              <a:t>© 2026 Modelica Association Project FMI | fmi-standard.org</a:t>
             </a:r>
           </a:p>
         </p:txBody>
@@ -6031,13 +5687,13 @@
           <p:nvPr/>
         </p:nvPicPr>
         <p:blipFill>
-          <a:blip r:embed="rId2">
+          <a:blip>
             <a:extLst>
               <a:ext uri="{28A0092B-C50C-407E-A947-70E740481C1C}">
                 <a14:useLocalDpi xmlns:a14="http://schemas.microsoft.com/office/drawing/2010/main" val="0"/>
               </a:ext>
               <a:ext uri="{96DAC541-7B7A-43D3-8B79-37D633B846F1}">
-                <asvg:svgBlip xmlns:asvg="http://schemas.microsoft.com/office/drawing/2016/SVG/main" r:embed="rId3"/>
+                <asvg:svgBlip xmlns:asvg="http://schemas.microsoft.com/office/drawing/2016/SVG/main" r:embed="rId2"/>
               </a:ext>
             </a:extLst>
           </a:blip>
@@ -16430,107 +16086,6 @@
       </p:pic>
       <p:sp>
         <p:nvSpPr>
-          <p:cNvPr id="3" name="TextBox 2">
-            <a:extLst>
-              <a:ext uri="{FF2B5EF4-FFF2-40B4-BE49-F238E27FC236}">
-                <a16:creationId xmlns:a16="http://schemas.microsoft.com/office/drawing/2014/main" id="{D9B8BF98-CDEA-294F-5A40-BA21B6EEF1E0}"/>
-              </a:ext>
-            </a:extLst>
-          </p:cNvPr>
-          <p:cNvSpPr txBox="1"/>
-          <p:nvPr/>
-        </p:nvSpPr>
-        <p:spPr>
-          <a:xfrm>
-            <a:off x="664119" y="2022364"/>
-            <a:ext cx="4823460" cy="646331"/>
-          </a:xfrm>
-          <a:prstGeom prst="rect">
-            <a:avLst/>
-          </a:prstGeom>
-          <a:noFill/>
-        </p:spPr>
-        <p:txBody>
-          <a:bodyPr wrap="square" rtlCol="0">
-            <a:spAutoFit/>
-          </a:bodyPr>
-          <a:lstStyle/>
-          <a:p>
-            <a:r>
-              <a:rPr lang="en-US" sz="1800" dirty="0">
-                <a:solidFill>
-                  <a:srgbClr val="5E676E"/>
-                </a:solidFill>
-                <a:latin typeface="+mn-lt"/>
-                <a:cs typeface="+mn-cs"/>
-              </a:rPr>
-              <a:t>Presenter:</a:t>
-            </a:r>
-            <a:br>
-              <a:rPr lang="en-US" sz="1800" dirty="0">
-                <a:solidFill>
-                  <a:srgbClr val="5E676E"/>
-                </a:solidFill>
-                <a:latin typeface="+mn-lt"/>
-                <a:cs typeface="+mn-cs"/>
-              </a:rPr>
-            </a:br>
-            <a:r>
-              <a:rPr lang="en-US" sz="1800" dirty="0">
-                <a:solidFill>
-                  <a:srgbClr val="5E676E"/>
-                </a:solidFill>
-                <a:latin typeface="+mn-lt"/>
-                <a:cs typeface="+mn-cs"/>
-              </a:rPr>
-              <a:t>Christian Bertsch, Bosch Research</a:t>
-            </a:r>
-          </a:p>
-        </p:txBody>
-      </p:sp>
-      <p:sp>
-        <p:nvSpPr>
-          <p:cNvPr id="7" name="TextBox 4">
-            <a:extLst>
-              <a:ext uri="{FF2B5EF4-FFF2-40B4-BE49-F238E27FC236}">
-                <a16:creationId xmlns:a16="http://schemas.microsoft.com/office/drawing/2014/main" id="{978ADD06-3B1E-7161-A229-C13B73EE0EAF}"/>
-              </a:ext>
-            </a:extLst>
-          </p:cNvPr>
-          <p:cNvSpPr txBox="1"/>
-          <p:nvPr/>
-        </p:nvSpPr>
-        <p:spPr>
-          <a:xfrm>
-            <a:off x="9619757" y="3586701"/>
-            <a:ext cx="2142256" cy="369332"/>
-          </a:xfrm>
-          <a:prstGeom prst="rect">
-            <a:avLst/>
-          </a:prstGeom>
-          <a:noFill/>
-        </p:spPr>
-        <p:txBody>
-          <a:bodyPr wrap="square" rtlCol="0">
-            <a:spAutoFit/>
-          </a:bodyPr>
-          <a:lstStyle/>
-          <a:p>
-            <a:r>
-              <a:rPr lang="en-US" sz="1800" dirty="0">
-                <a:solidFill>
-                  <a:srgbClr val="5E676E"/>
-                </a:solidFill>
-                <a:latin typeface="+mn-lt"/>
-                <a:cs typeface="+mn-cs"/>
-              </a:rPr>
-              <a:t>Online Materials:</a:t>
-            </a:r>
-          </a:p>
-        </p:txBody>
-      </p:sp>
-      <p:sp>
-        <p:nvSpPr>
           <p:cNvPr id="10" name="TextBox 6">
             <a:extLst>
               <a:ext uri="{FF2B5EF4-FFF2-40B4-BE49-F238E27FC236}">
@@ -16608,12 +16163,132 @@
           </a:p>
         </p:txBody>
       </p:sp>
+      <p:sp>
+        <p:nvSpPr>
+          <p:cNvPr id="8" name="TextBox 7">
+            <a:extLst>
+              <a:ext uri="{FF2B5EF4-FFF2-40B4-BE49-F238E27FC236}">
+                <a16:creationId xmlns:a16="http://schemas.microsoft.com/office/drawing/2014/main" id="{EC2A14C4-F976-E8A6-CE84-76B8EBE1B3B6}"/>
+              </a:ext>
+            </a:extLst>
+          </p:cNvPr>
+          <p:cNvSpPr txBox="1"/>
+          <p:nvPr/>
+        </p:nvSpPr>
+        <p:spPr>
+          <a:xfrm>
+            <a:off x="9641566" y="3785577"/>
+            <a:ext cx="2142256" cy="369332"/>
+          </a:xfrm>
+          <a:prstGeom prst="rect">
+            <a:avLst/>
+          </a:prstGeom>
+          <a:noFill/>
+        </p:spPr>
+        <p:txBody>
+          <a:bodyPr wrap="square" rtlCol="0">
+            <a:spAutoFit/>
+          </a:bodyPr>
+          <a:lstStyle/>
+          <a:p>
+            <a:r>
+              <a:rPr lang="en-US" sz="1800" dirty="0">
+                <a:solidFill>
+                  <a:srgbClr val="5E676E"/>
+                </a:solidFill>
+                <a:latin typeface="+mn-lt"/>
+                <a:cs typeface="+mn-cs"/>
+              </a:rPr>
+              <a:t>Online Materials:</a:t>
+            </a:r>
+          </a:p>
+        </p:txBody>
+      </p:sp>
+      <p:sp>
+        <p:nvSpPr>
+          <p:cNvPr id="12" name="TextBox 11">
+            <a:extLst>
+              <a:ext uri="{FF2B5EF4-FFF2-40B4-BE49-F238E27FC236}">
+                <a16:creationId xmlns:a16="http://schemas.microsoft.com/office/drawing/2014/main" id="{D533FDBE-2833-0EAB-8C7F-9D967A3FB131}"/>
+              </a:ext>
+            </a:extLst>
+          </p:cNvPr>
+          <p:cNvSpPr txBox="1"/>
+          <p:nvPr/>
+        </p:nvSpPr>
+        <p:spPr>
+          <a:xfrm>
+            <a:off x="9534916" y="5961260"/>
+            <a:ext cx="4823460" cy="738664"/>
+          </a:xfrm>
+          <a:prstGeom prst="rect">
+            <a:avLst/>
+          </a:prstGeom>
+          <a:noFill/>
+        </p:spPr>
+        <p:txBody>
+          <a:bodyPr wrap="square" rtlCol="0">
+            <a:spAutoFit/>
+          </a:bodyPr>
+          <a:lstStyle/>
+          <a:p>
+            <a:r>
+              <a:rPr lang="en-US" sz="1200" dirty="0">
+                <a:solidFill>
+                  <a:srgbClr val="5E676E"/>
+                </a:solidFill>
+                <a:latin typeface="+mn-lt"/>
+                <a:cs typeface="+mn-cs"/>
+                <a:hlinkClick r:id="rId4"/>
+              </a:rPr>
+              <a:t>https://github.com/modelica/</a:t>
+            </a:r>
+            <a:br>
+              <a:rPr lang="en-US" sz="1200" dirty="0">
+                <a:solidFill>
+                  <a:srgbClr val="5E676E"/>
+                </a:solidFill>
+                <a:latin typeface="+mn-lt"/>
+                <a:cs typeface="+mn-cs"/>
+                <a:hlinkClick r:id="rId4"/>
+              </a:rPr>
+            </a:br>
+            <a:r>
+              <a:rPr lang="en-US" sz="1200" dirty="0">
+                <a:solidFill>
+                  <a:srgbClr val="5E676E"/>
+                </a:solidFill>
+                <a:latin typeface="+mn-lt"/>
+                <a:cs typeface="+mn-cs"/>
+                <a:hlinkClick r:id="rId4"/>
+              </a:rPr>
+              <a:t>fmi-beginners-tutorial-2026/tree/main</a:t>
+            </a:r>
+            <a:endParaRPr lang="en-US" sz="1200" dirty="0">
+              <a:solidFill>
+                <a:srgbClr val="5E676E"/>
+              </a:solidFill>
+              <a:latin typeface="+mn-lt"/>
+              <a:cs typeface="+mn-cs"/>
+            </a:endParaRPr>
+          </a:p>
+          <a:p>
+            <a:endParaRPr lang="en-US" sz="1800" dirty="0">
+              <a:solidFill>
+                <a:srgbClr val="5E676E"/>
+              </a:solidFill>
+              <a:latin typeface="+mn-lt"/>
+              <a:cs typeface="+mn-cs"/>
+            </a:endParaRPr>
+          </a:p>
+        </p:txBody>
+      </p:sp>
       <p:pic>
         <p:nvPicPr>
-          <p:cNvPr id="11" name="Grafik 10">
+          <p:cNvPr id="14" name="Graphic 13">
             <a:extLst>
               <a:ext uri="{FF2B5EF4-FFF2-40B4-BE49-F238E27FC236}">
-                <a16:creationId xmlns:a16="http://schemas.microsoft.com/office/drawing/2014/main" id="{85547DFE-87A6-5D51-B6B2-16817869D8DB}"/>
+                <a16:creationId xmlns:a16="http://schemas.microsoft.com/office/drawing/2014/main" id="{573C772E-696C-0255-E576-75AAA2DF2219}"/>
               </a:ext>
             </a:extLst>
           </p:cNvPr>
@@ -16623,11 +16298,8 @@
           <p:nvPr/>
         </p:nvPicPr>
         <p:blipFill>
-          <a:blip r:embed="rId4">
+          <a:blip>
             <a:extLst>
-              <a:ext uri="{28A0092B-C50C-407E-A947-70E740481C1C}">
-                <a14:useLocalDpi xmlns:a14="http://schemas.microsoft.com/office/drawing/2010/main" val="0"/>
-              </a:ext>
               <a:ext uri="{96DAC541-7B7A-43D3-8B79-37D633B846F1}">
                 <asvg:svgBlip xmlns:asvg="http://schemas.microsoft.com/office/drawing/2016/SVG/main" r:embed="rId5"/>
               </a:ext>
@@ -16639,8 +16311,8 @@
         </p:blipFill>
         <p:spPr>
           <a:xfrm>
-            <a:off x="9787923" y="4049318"/>
-            <a:ext cx="1974090" cy="1974090"/>
+            <a:off x="9641566" y="4078152"/>
+            <a:ext cx="1821427" cy="1821427"/>
           </a:xfrm>
           <a:prstGeom prst="rect">
             <a:avLst/>
@@ -16710,6 +16382,13 @@
           <a:bodyPr/>
           <a:lstStyle/>
           <a:p>
+            <a:r>
+              <a:rPr lang="en-US" sz="4800" b="1" dirty="0"/>
+              <a:t>Demo: </a:t>
+            </a:r>
+            <a:br>
+              <a:rPr lang="en-US" sz="4800" b="1" dirty="0"/>
+            </a:br>
             <a:r>
               <a:rPr lang="en-US" sz="4800" b="1" dirty="0"/>
               <a:t>Example model for hands-on part </a:t>
@@ -19543,7 +19222,7 @@
             </a:pPr>
             <a:r>
               <a:rPr lang="en-US" dirty="0"/>
-              <a:t>2024, 25: Release of FMI Layered Standards FMI-LS-XCP, FMI-LS-XCP</a:t>
+              <a:t>2024, 25, 26: Release of FMI Layered Standards (FMI-LS-XCP, FMI-LS-BUS, … )</a:t>
             </a:r>
           </a:p>
           <a:p>
@@ -19658,13 +19337,13 @@
           <p:nvPr/>
         </p:nvPicPr>
         <p:blipFill>
-          <a:blip r:embed="rId4">
+          <a:blip>
             <a:extLst>
               <a:ext uri="{28A0092B-C50C-407E-A947-70E740481C1C}">
                 <a14:useLocalDpi xmlns:a14="http://schemas.microsoft.com/office/drawing/2010/main" val="0"/>
               </a:ext>
               <a:ext uri="{96DAC541-7B7A-43D3-8B79-37D633B846F1}">
-                <asvg:svgBlip xmlns:asvg="http://schemas.microsoft.com/office/drawing/2016/SVG/main" r:embed="rId5"/>
+                <asvg:svgBlip xmlns:asvg="http://schemas.microsoft.com/office/drawing/2016/SVG/main" r:embed="rId4"/>
               </a:ext>
             </a:extLst>
           </a:blip>
@@ -20667,7 +20346,7 @@
             </a:pPr>
             <a:r>
               <a:rPr lang="en-US" sz="2000" b="1" dirty="0"/>
-              <a:t>250+ tools </a:t>
+              <a:t>280+ tools </a:t>
             </a:r>
             <a:r>
               <a:rPr lang="en-US" sz="2000" dirty="0"/>
@@ -20852,23 +20531,7 @@
                   <a:srgbClr val="C00000"/>
                 </a:solidFill>
               </a:rPr>
-              <a:t>© 2025 Modelica </a:t>
-            </a:r>
-            <a:r>
-              <a:rPr lang="de-DE" sz="1000" dirty="0" err="1">
-                <a:solidFill>
-                  <a:srgbClr val="C00000"/>
-                </a:solidFill>
-              </a:rPr>
-              <a:t>Association</a:t>
-            </a:r>
-            <a:r>
-              <a:rPr lang="de-DE" sz="1000" dirty="0">
-                <a:solidFill>
-                  <a:srgbClr val="C00000"/>
-                </a:solidFill>
-              </a:rPr>
-              <a:t> Project FMI | fmi-standard.org</a:t>
+              <a:t>© 2026 Modelica Association Project FMI | fmi-standard.org</a:t>
             </a:r>
           </a:p>
         </p:txBody>
@@ -21572,23 +21235,7 @@
                   <a:srgbClr val="C00000"/>
                 </a:solidFill>
               </a:rPr>
-              <a:t>© 2025 Modelica </a:t>
-            </a:r>
-            <a:r>
-              <a:rPr lang="de-DE" sz="1000" dirty="0" err="1">
-                <a:solidFill>
-                  <a:srgbClr val="C00000"/>
-                </a:solidFill>
-              </a:rPr>
-              <a:t>Association</a:t>
-            </a:r>
-            <a:r>
-              <a:rPr lang="de-DE" sz="1000" dirty="0">
-                <a:solidFill>
-                  <a:srgbClr val="C00000"/>
-                </a:solidFill>
-              </a:rPr>
-              <a:t> Project FMI | fmi-standard.org</a:t>
+              <a:t>© 2026 Modelica Association Project FMI | fmi-standard.org</a:t>
             </a:r>
           </a:p>
         </p:txBody>
@@ -22015,9 +21662,9 @@
 </file>
 
 <file path=ppt/theme/theme2.xml><?xml version="1.0" encoding="utf-8"?>
-<a:theme xmlns:a="http://schemas.openxmlformats.org/drawingml/2006/main" name="Larissa">
+<a:theme xmlns:a="http://schemas.openxmlformats.org/drawingml/2006/main" name="Office Theme">
   <a:themeElements>
-    <a:clrScheme name="Larissa">
+    <a:clrScheme name="Office">
       <a:dk1>
         <a:sysClr val="windowText" lastClr="000000"/>
       </a:dk1>
@@ -22025,44 +21672,44 @@
         <a:sysClr val="window" lastClr="FFFFFF"/>
       </a:lt1>
       <a:dk2>
-        <a:srgbClr val="1F497D"/>
+        <a:srgbClr val="0E2841"/>
       </a:dk2>
       <a:lt2>
-        <a:srgbClr val="EEECE1"/>
+        <a:srgbClr val="E8E8E8"/>
       </a:lt2>
       <a:accent1>
-        <a:srgbClr val="4F81BD"/>
+        <a:srgbClr val="156082"/>
       </a:accent1>
       <a:accent2>
-        <a:srgbClr val="C0504D"/>
+        <a:srgbClr val="E97132"/>
       </a:accent2>
       <a:accent3>
-        <a:srgbClr val="9BBB59"/>
+        <a:srgbClr val="196B24"/>
       </a:accent3>
       <a:accent4>
-        <a:srgbClr val="8064A2"/>
+        <a:srgbClr val="0F9ED5"/>
       </a:accent4>
       <a:accent5>
-        <a:srgbClr val="4BACC6"/>
+        <a:srgbClr val="A02B93"/>
       </a:accent5>
       <a:accent6>
-        <a:srgbClr val="F79646"/>
+        <a:srgbClr val="4EA72E"/>
       </a:accent6>
       <a:hlink>
-        <a:srgbClr val="0000FF"/>
+        <a:srgbClr val="467886"/>
       </a:hlink>
       <a:folHlink>
-        <a:srgbClr val="800080"/>
+        <a:srgbClr val="96607D"/>
       </a:folHlink>
     </a:clrScheme>
-    <a:fontScheme name="Larissa">
+    <a:fontScheme name="Office">
       <a:majorFont>
-        <a:latin typeface="Calibri"/>
+        <a:latin typeface="Aptos Display" panose="02110004020202020204"/>
         <a:ea typeface=""/>
         <a:cs typeface=""/>
-        <a:font script="Jpan" typeface="ＭＳ Ｐゴシック"/>
+        <a:font script="Jpan" typeface="游ゴシック Light"/>
         <a:font script="Hang" typeface="맑은 고딕"/>
-        <a:font script="Hans" typeface="宋体"/>
+        <a:font script="Hans" typeface="等线 Light"/>
         <a:font script="Hant" typeface="新細明體"/>
         <a:font script="Arab" typeface="Times New Roman"/>
         <a:font script="Hebr" typeface="Times New Roman"/>
@@ -22090,14 +21737,31 @@
         <a:font script="Viet" typeface="Times New Roman"/>
         <a:font script="Uigh" typeface="Microsoft Uighur"/>
         <a:font script="Geor" typeface="Sylfaen"/>
+        <a:font script="Armn" typeface="Arial"/>
+        <a:font script="Bugi" typeface="Leelawadee UI"/>
+        <a:font script="Bopo" typeface="Microsoft JhengHei"/>
+        <a:font script="Java" typeface="Javanese Text"/>
+        <a:font script="Lisu" typeface="Segoe UI"/>
+        <a:font script="Mymr" typeface="Myanmar Text"/>
+        <a:font script="Nkoo" typeface="Ebrima"/>
+        <a:font script="Olck" typeface="Nirmala UI"/>
+        <a:font script="Osma" typeface="Ebrima"/>
+        <a:font script="Phag" typeface="Phagspa"/>
+        <a:font script="Syrn" typeface="Estrangelo Edessa"/>
+        <a:font script="Syrj" typeface="Estrangelo Edessa"/>
+        <a:font script="Syre" typeface="Estrangelo Edessa"/>
+        <a:font script="Sora" typeface="Nirmala UI"/>
+        <a:font script="Tale" typeface="Microsoft Tai Le"/>
+        <a:font script="Talu" typeface="Microsoft New Tai Lue"/>
+        <a:font script="Tfng" typeface="Ebrima"/>
       </a:majorFont>
       <a:minorFont>
-        <a:latin typeface="Calibri"/>
+        <a:latin typeface="Aptos" panose="02110004020202020204"/>
         <a:ea typeface=""/>
         <a:cs typeface=""/>
-        <a:font script="Jpan" typeface="ＭＳ Ｐゴシック"/>
+        <a:font script="Jpan" typeface="游ゴシック"/>
         <a:font script="Hang" typeface="맑은 고딕"/>
-        <a:font script="Hans" typeface="宋体"/>
+        <a:font script="Hans" typeface="等线"/>
         <a:font script="Hant" typeface="新細明體"/>
         <a:font script="Arab" typeface="Arial"/>
         <a:font script="Hebr" typeface="Arial"/>
@@ -22125,9 +21789,26 @@
         <a:font script="Viet" typeface="Arial"/>
         <a:font script="Uigh" typeface="Microsoft Uighur"/>
         <a:font script="Geor" typeface="Sylfaen"/>
+        <a:font script="Armn" typeface="Arial"/>
+        <a:font script="Bugi" typeface="Leelawadee UI"/>
+        <a:font script="Bopo" typeface="Microsoft JhengHei"/>
+        <a:font script="Java" typeface="Javanese Text"/>
+        <a:font script="Lisu" typeface="Segoe UI"/>
+        <a:font script="Mymr" typeface="Myanmar Text"/>
+        <a:font script="Nkoo" typeface="Ebrima"/>
+        <a:font script="Olck" typeface="Nirmala UI"/>
+        <a:font script="Osma" typeface="Ebrima"/>
+        <a:font script="Phag" typeface="Phagspa"/>
+        <a:font script="Syrn" typeface="Estrangelo Edessa"/>
+        <a:font script="Syrj" typeface="Estrangelo Edessa"/>
+        <a:font script="Syre" typeface="Estrangelo Edessa"/>
+        <a:font script="Sora" typeface="Nirmala UI"/>
+        <a:font script="Tale" typeface="Microsoft Tai Le"/>
+        <a:font script="Talu" typeface="Microsoft New Tai Lue"/>
+        <a:font script="Tfng" typeface="Ebrima"/>
       </a:minorFont>
     </a:fontScheme>
-    <a:fmtScheme name="Larissa">
+    <a:fmtScheme name="Office">
       <a:fillStyleLst>
         <a:solidFill>
           <a:schemeClr val="phClr"/>
@@ -22136,166 +21817,162 @@
           <a:gsLst>
             <a:gs pos="0">
               <a:schemeClr val="phClr">
-                <a:tint val="50000"/>
-                <a:satMod val="300000"/>
+                <a:lumMod val="110000"/>
+                <a:satMod val="105000"/>
+                <a:tint val="67000"/>
               </a:schemeClr>
             </a:gs>
-            <a:gs pos="35000">
+            <a:gs pos="50000">
               <a:schemeClr val="phClr">
-                <a:tint val="37000"/>
-                <a:satMod val="300000"/>
+                <a:lumMod val="105000"/>
+                <a:satMod val="103000"/>
+                <a:tint val="73000"/>
               </a:schemeClr>
             </a:gs>
             <a:gs pos="100000">
               <a:schemeClr val="phClr">
-                <a:tint val="15000"/>
-                <a:satMod val="350000"/>
+                <a:lumMod val="105000"/>
+                <a:satMod val="109000"/>
+                <a:tint val="81000"/>
               </a:schemeClr>
             </a:gs>
           </a:gsLst>
-          <a:lin ang="16200000" scaled="1"/>
+          <a:lin ang="5400000" scaled="0"/>
         </a:gradFill>
         <a:gradFill rotWithShape="1">
           <a:gsLst>
             <a:gs pos="0">
               <a:schemeClr val="phClr">
-                <a:shade val="51000"/>
-                <a:satMod val="130000"/>
+                <a:satMod val="103000"/>
+                <a:lumMod val="102000"/>
+                <a:tint val="94000"/>
               </a:schemeClr>
             </a:gs>
-            <a:gs pos="80000">
+            <a:gs pos="50000">
               <a:schemeClr val="phClr">
-                <a:shade val="93000"/>
-                <a:satMod val="130000"/>
+                <a:satMod val="110000"/>
+                <a:lumMod val="100000"/>
+                <a:shade val="100000"/>
               </a:schemeClr>
             </a:gs>
             <a:gs pos="100000">
               <a:schemeClr val="phClr">
-                <a:shade val="94000"/>
-                <a:satMod val="135000"/>
+                <a:lumMod val="99000"/>
+                <a:satMod val="120000"/>
+                <a:shade val="78000"/>
               </a:schemeClr>
             </a:gs>
           </a:gsLst>
-          <a:lin ang="16200000" scaled="0"/>
+          <a:lin ang="5400000" scaled="0"/>
         </a:gradFill>
       </a:fillStyleLst>
       <a:lnStyleLst>
-        <a:ln w="9525" cap="flat" cmpd="sng" algn="ctr">
+        <a:ln w="12700" cap="flat" cmpd="sng" algn="ctr">
           <a:solidFill>
-            <a:schemeClr val="phClr">
-              <a:shade val="95000"/>
-              <a:satMod val="105000"/>
-            </a:schemeClr>
+            <a:schemeClr val="phClr"/>
           </a:solidFill>
           <a:prstDash val="solid"/>
+          <a:miter lim="800000"/>
+        </a:ln>
+        <a:ln w="19050" cap="flat" cmpd="sng" algn="ctr">
+          <a:solidFill>
+            <a:schemeClr val="phClr"/>
+          </a:solidFill>
+          <a:prstDash val="solid"/>
+          <a:miter lim="800000"/>
         </a:ln>
         <a:ln w="25400" cap="flat" cmpd="sng" algn="ctr">
           <a:solidFill>
             <a:schemeClr val="phClr"/>
           </a:solidFill>
           <a:prstDash val="solid"/>
-        </a:ln>
-        <a:ln w="38100" cap="flat" cmpd="sng" algn="ctr">
-          <a:solidFill>
-            <a:schemeClr val="phClr"/>
-          </a:solidFill>
-          <a:prstDash val="solid"/>
+          <a:miter lim="800000"/>
         </a:ln>
       </a:lnStyleLst>
       <a:effectStyleLst>
         <a:effectStyle>
+          <a:effectLst/>
+        </a:effectStyle>
+        <a:effectStyle>
+          <a:effectLst/>
+        </a:effectStyle>
+        <a:effectStyle>
           <a:effectLst>
-            <a:outerShdw blurRad="40000" dist="20000" dir="5400000" rotWithShape="0">
+            <a:outerShdw blurRad="57150" dist="19050" dir="5400000" algn="ctr" rotWithShape="0">
               <a:srgbClr val="000000">
-                <a:alpha val="38000"/>
+                <a:alpha val="63000"/>
               </a:srgbClr>
             </a:outerShdw>
           </a:effectLst>
-        </a:effectStyle>
-        <a:effectStyle>
-          <a:effectLst>
-            <a:outerShdw blurRad="40000" dist="23000" dir="5400000" rotWithShape="0">
-              <a:srgbClr val="000000">
-                <a:alpha val="35000"/>
-              </a:srgbClr>
-            </a:outerShdw>
-          </a:effectLst>
-        </a:effectStyle>
-        <a:effectStyle>
-          <a:effectLst>
-            <a:outerShdw blurRad="40000" dist="23000" dir="5400000" rotWithShape="0">
-              <a:srgbClr val="000000">
-                <a:alpha val="35000"/>
-              </a:srgbClr>
-            </a:outerShdw>
-          </a:effectLst>
-          <a:scene3d>
-            <a:camera prst="orthographicFront">
-              <a:rot lat="0" lon="0" rev="0"/>
-            </a:camera>
-            <a:lightRig rig="threePt" dir="t">
-              <a:rot lat="0" lon="0" rev="1200000"/>
-            </a:lightRig>
-          </a:scene3d>
-          <a:sp3d>
-            <a:bevelT w="63500" h="25400"/>
-          </a:sp3d>
         </a:effectStyle>
       </a:effectStyleLst>
       <a:bgFillStyleLst>
         <a:solidFill>
           <a:schemeClr val="phClr"/>
         </a:solidFill>
+        <a:solidFill>
+          <a:schemeClr val="phClr">
+            <a:tint val="95000"/>
+            <a:satMod val="170000"/>
+          </a:schemeClr>
+        </a:solidFill>
         <a:gradFill rotWithShape="1">
           <a:gsLst>
             <a:gs pos="0">
               <a:schemeClr val="phClr">
-                <a:tint val="40000"/>
-                <a:satMod val="350000"/>
+                <a:tint val="93000"/>
+                <a:satMod val="150000"/>
+                <a:shade val="98000"/>
+                <a:lumMod val="102000"/>
               </a:schemeClr>
             </a:gs>
-            <a:gs pos="40000">
+            <a:gs pos="50000">
               <a:schemeClr val="phClr">
-                <a:tint val="45000"/>
-                <a:shade val="99000"/>
-                <a:satMod val="350000"/>
+                <a:tint val="98000"/>
+                <a:satMod val="130000"/>
+                <a:shade val="90000"/>
+                <a:lumMod val="103000"/>
               </a:schemeClr>
             </a:gs>
             <a:gs pos="100000">
               <a:schemeClr val="phClr">
-                <a:shade val="20000"/>
-                <a:satMod val="255000"/>
+                <a:shade val="63000"/>
+                <a:satMod val="120000"/>
               </a:schemeClr>
             </a:gs>
           </a:gsLst>
-          <a:path path="circle">
-            <a:fillToRect l="50000" t="-80000" r="50000" b="180000"/>
-          </a:path>
-        </a:gradFill>
-        <a:gradFill rotWithShape="1">
-          <a:gsLst>
-            <a:gs pos="0">
-              <a:schemeClr val="phClr">
-                <a:tint val="80000"/>
-                <a:satMod val="300000"/>
-              </a:schemeClr>
-            </a:gs>
-            <a:gs pos="100000">
-              <a:schemeClr val="phClr">
-                <a:shade val="30000"/>
-                <a:satMod val="200000"/>
-              </a:schemeClr>
-            </a:gs>
-          </a:gsLst>
-          <a:path path="circle">
-            <a:fillToRect l="50000" t="50000" r="50000" b="50000"/>
-          </a:path>
+          <a:lin ang="5400000" scaled="0"/>
         </a:gradFill>
       </a:bgFillStyleLst>
     </a:fmtScheme>
   </a:themeElements>
-  <a:objectDefaults/>
+  <a:objectDefaults>
+    <a:lnDef>
+      <a:spPr/>
+      <a:bodyPr/>
+      <a:lstStyle/>
+      <a:style>
+        <a:lnRef idx="2">
+          <a:schemeClr val="accent1"/>
+        </a:lnRef>
+        <a:fillRef idx="0">
+          <a:schemeClr val="accent1"/>
+        </a:fillRef>
+        <a:effectRef idx="1">
+          <a:schemeClr val="accent1"/>
+        </a:effectRef>
+        <a:fontRef idx="minor">
+          <a:schemeClr val="tx1"/>
+        </a:fontRef>
+      </a:style>
+    </a:lnDef>
+  </a:objectDefaults>
   <a:extraClrSchemeLst/>
+  <a:extLst>
+    <a:ext uri="{05A4C25C-085E-4340-85A3-A5531E510DB2}">
+      <thm15:themeFamily xmlns:thm15="http://schemas.microsoft.com/office/thememl/2012/main" name="Office Theme" id="{2E142A2C-CD16-42D6-873A-C26D2A0506FA}" vid="{1BDDFF52-6CD6-40A5-AB3C-68EB2F1E4D0A}"/>
+    </a:ext>
+  </a:extLst>
 </a:theme>
 </file>
 
